--- a/Tutorial/OsarTutorial/02_FeedbackDelay/feedbackdelay.pptx
+++ b/Tutorial/OsarTutorial/02_FeedbackDelay/feedbackdelay.pptx
@@ -118,7 +118,7 @@
 <file path=ppt/revisionInfo.xml><?xml version="1.0" encoding="utf-8"?>
 <p1510:revInfo xmlns:a="http://schemas.openxmlformats.org/drawingml/2006/main" xmlns:r="http://schemas.openxmlformats.org/officeDocument/2006/relationships" xmlns:p1510="http://schemas.microsoft.com/office/powerpoint/2015/10/main">
   <p1510:revLst>
-    <p1510:client id="{2DD4C6F9-B693-482E-B1B8-D61335F4EE17}" v="1" dt="2025-07-23T10:21:46.483"/>
+    <p1510:client id="{CEBAF6ED-BE92-43CE-8AFF-17A78E8248CB}" v="3" dt="2026-03-11T16:07:53.163"/>
   </p1510:revLst>
 </p1510:revInfo>
 </file>
@@ -126,205 +126,122 @@
 <file path=ppt/changesInfos/changesInfo1.xml><?xml version="1.0" encoding="utf-8"?>
 <pc:chgInfo xmlns:a="http://schemas.openxmlformats.org/drawingml/2006/main" xmlns:r="http://schemas.openxmlformats.org/officeDocument/2006/relationships" xmlns:ac="http://schemas.microsoft.com/office/drawing/2013/main/command" xmlns:pc="http://schemas.microsoft.com/office/powerpoint/2013/main/command">
   <pc:docChgLst>
-    <pc:chgData name="Joshua Reiss" userId="71f87c30-4769-4a42-a082-a6a82298c8cb" providerId="ADAL" clId="{2DD4C6F9-B693-482E-B1B8-D61335F4EE17}"/>
-    <pc:docChg chg="modSld">
-      <pc:chgData name="Joshua Reiss" userId="71f87c30-4769-4a42-a082-a6a82298c8cb" providerId="ADAL" clId="{2DD4C6F9-B693-482E-B1B8-D61335F4EE17}" dt="2025-07-23T10:21:46.483" v="0" actId="164"/>
+    <pc:chgData name="Josh Reiss" userId="71f87c30-4769-4a42-a082-a6a82298c8cb" providerId="ADAL" clId="{A0C6B147-1166-4B44-A00D-F3D77F199F8E}"/>
+    <pc:docChg chg="undo redo custSel modSld">
+      <pc:chgData name="Josh Reiss" userId="71f87c30-4769-4a42-a082-a6a82298c8cb" providerId="ADAL" clId="{A0C6B147-1166-4B44-A00D-F3D77F199F8E}" dt="2026-03-11T16:10:01.121" v="116" actId="14100"/>
       <pc:docMkLst>
         <pc:docMk/>
       </pc:docMkLst>
-      <pc:sldChg chg="addSp modSp">
-        <pc:chgData name="Joshua Reiss" userId="71f87c30-4769-4a42-a082-a6a82298c8cb" providerId="ADAL" clId="{2DD4C6F9-B693-482E-B1B8-D61335F4EE17}" dt="2025-07-23T10:21:46.483" v="0" actId="164"/>
-        <pc:sldMkLst>
-          <pc:docMk/>
-          <pc:sldMk cId="4287236545" sldId="352"/>
-        </pc:sldMkLst>
-        <pc:spChg chg="mod">
-          <ac:chgData name="Joshua Reiss" userId="71f87c30-4769-4a42-a082-a6a82298c8cb" providerId="ADAL" clId="{2DD4C6F9-B693-482E-B1B8-D61335F4EE17}" dt="2025-07-23T10:21:46.483" v="0" actId="164"/>
-          <ac:spMkLst>
-            <pc:docMk/>
-            <pc:sldMk cId="4287236545" sldId="352"/>
-            <ac:spMk id="8" creationId="{1A76E437-7554-4B56-C4E2-BB3C0E4AEA31}"/>
-          </ac:spMkLst>
-        </pc:spChg>
-        <pc:spChg chg="mod">
-          <ac:chgData name="Joshua Reiss" userId="71f87c30-4769-4a42-a082-a6a82298c8cb" providerId="ADAL" clId="{2DD4C6F9-B693-482E-B1B8-D61335F4EE17}" dt="2025-07-23T10:21:46.483" v="0" actId="164"/>
-          <ac:spMkLst>
-            <pc:docMk/>
-            <pc:sldMk cId="4287236545" sldId="352"/>
-            <ac:spMk id="9" creationId="{7D6EC9BA-C03E-26D1-FAD2-EAF6500A119B}"/>
-          </ac:spMkLst>
-        </pc:spChg>
-        <pc:spChg chg="mod">
-          <ac:chgData name="Joshua Reiss" userId="71f87c30-4769-4a42-a082-a6a82298c8cb" providerId="ADAL" clId="{2DD4C6F9-B693-482E-B1B8-D61335F4EE17}" dt="2025-07-23T10:21:46.483" v="0" actId="164"/>
-          <ac:spMkLst>
-            <pc:docMk/>
-            <pc:sldMk cId="4287236545" sldId="352"/>
-            <ac:spMk id="10" creationId="{B5081D72-5F55-AF7E-6F70-312422E679C4}"/>
-          </ac:spMkLst>
-        </pc:spChg>
-        <pc:spChg chg="mod">
-          <ac:chgData name="Joshua Reiss" userId="71f87c30-4769-4a42-a082-a6a82298c8cb" providerId="ADAL" clId="{2DD4C6F9-B693-482E-B1B8-D61335F4EE17}" dt="2025-07-23T10:21:46.483" v="0" actId="164"/>
-          <ac:spMkLst>
-            <pc:docMk/>
-            <pc:sldMk cId="4287236545" sldId="352"/>
-            <ac:spMk id="11" creationId="{02F4F030-6317-C08E-2981-31F49999B6D7}"/>
-          </ac:spMkLst>
-        </pc:spChg>
-        <pc:spChg chg="mod">
-          <ac:chgData name="Joshua Reiss" userId="71f87c30-4769-4a42-a082-a6a82298c8cb" providerId="ADAL" clId="{2DD4C6F9-B693-482E-B1B8-D61335F4EE17}" dt="2025-07-23T10:21:46.483" v="0" actId="164"/>
-          <ac:spMkLst>
-            <pc:docMk/>
-            <pc:sldMk cId="4287236545" sldId="352"/>
-            <ac:spMk id="16" creationId="{FEA53039-A3DB-31C0-15B9-B21868D43CCD}"/>
-          </ac:spMkLst>
-        </pc:spChg>
-        <pc:spChg chg="mod">
-          <ac:chgData name="Joshua Reiss" userId="71f87c30-4769-4a42-a082-a6a82298c8cb" providerId="ADAL" clId="{2DD4C6F9-B693-482E-B1B8-D61335F4EE17}" dt="2025-07-23T10:21:46.483" v="0" actId="164"/>
-          <ac:spMkLst>
-            <pc:docMk/>
-            <pc:sldMk cId="4287236545" sldId="352"/>
-            <ac:spMk id="19" creationId="{875DE4CB-A6E6-1D25-07A1-06577C926098}"/>
-          </ac:spMkLst>
-        </pc:spChg>
-        <pc:spChg chg="mod">
-          <ac:chgData name="Joshua Reiss" userId="71f87c30-4769-4a42-a082-a6a82298c8cb" providerId="ADAL" clId="{2DD4C6F9-B693-482E-B1B8-D61335F4EE17}" dt="2025-07-23T10:21:46.483" v="0" actId="164"/>
-          <ac:spMkLst>
-            <pc:docMk/>
-            <pc:sldMk cId="4287236545" sldId="352"/>
-            <ac:spMk id="22" creationId="{F0258842-9D83-3B98-6325-83CFFD82DFFC}"/>
-          </ac:spMkLst>
-        </pc:spChg>
-        <pc:grpChg chg="add mod">
-          <ac:chgData name="Joshua Reiss" userId="71f87c30-4769-4a42-a082-a6a82298c8cb" providerId="ADAL" clId="{2DD4C6F9-B693-482E-B1B8-D61335F4EE17}" dt="2025-07-23T10:21:46.483" v="0" actId="164"/>
-          <ac:grpSpMkLst>
-            <pc:docMk/>
-            <pc:sldMk cId="4287236545" sldId="352"/>
-            <ac:grpSpMk id="3" creationId="{8D9C7F2E-0DEE-BB09-7413-0E917DC97552}"/>
-          </ac:grpSpMkLst>
-        </pc:grpChg>
-        <pc:cxnChg chg="mod">
-          <ac:chgData name="Joshua Reiss" userId="71f87c30-4769-4a42-a082-a6a82298c8cb" providerId="ADAL" clId="{2DD4C6F9-B693-482E-B1B8-D61335F4EE17}" dt="2025-07-23T10:21:46.483" v="0" actId="164"/>
-          <ac:cxnSpMkLst>
-            <pc:docMk/>
-            <pc:sldMk cId="4287236545" sldId="352"/>
-            <ac:cxnSpMk id="15" creationId="{53D14D3D-1A10-DEA6-230D-5D42A8C50CD6}"/>
-          </ac:cxnSpMkLst>
-        </pc:cxnChg>
-        <pc:cxnChg chg="mod">
-          <ac:chgData name="Joshua Reiss" userId="71f87c30-4769-4a42-a082-a6a82298c8cb" providerId="ADAL" clId="{2DD4C6F9-B693-482E-B1B8-D61335F4EE17}" dt="2025-07-23T10:21:46.483" v="0" actId="164"/>
-          <ac:cxnSpMkLst>
-            <pc:docMk/>
-            <pc:sldMk cId="4287236545" sldId="352"/>
-            <ac:cxnSpMk id="23" creationId="{106AF0D4-0CD4-4EBB-E52E-C99FEA52B677}"/>
-          </ac:cxnSpMkLst>
-        </pc:cxnChg>
-      </pc:sldChg>
-    </pc:docChg>
-  </pc:docChgLst>
-  <pc:docChgLst>
-    <pc:chgData name="Joshua Reiss" userId="71f87c30-4769-4a42-a082-a6a82298c8cb" providerId="ADAL" clId="{D788B803-6CAF-456E-9D5B-399D0D7F1309}"/>
-    <pc:docChg chg="undo custSel addSld delSld modSld">
-      <pc:chgData name="Joshua Reiss" userId="71f87c30-4769-4a42-a082-a6a82298c8cb" providerId="ADAL" clId="{D788B803-6CAF-456E-9D5B-399D0D7F1309}" dt="2025-04-02T15:03:00.425" v="2167" actId="692"/>
-      <pc:docMkLst>
-        <pc:docMk/>
-      </pc:docMkLst>
-      <pc:sldChg chg="modSp add">
-        <pc:chgData name="Joshua Reiss" userId="71f87c30-4769-4a42-a082-a6a82298c8cb" providerId="ADAL" clId="{D788B803-6CAF-456E-9D5B-399D0D7F1309}" dt="2025-03-13T14:44:17.415" v="200" actId="5736"/>
-        <pc:sldMkLst>
-          <pc:docMk/>
-          <pc:sldMk cId="1710399065" sldId="272"/>
-        </pc:sldMkLst>
-      </pc:sldChg>
-      <pc:sldChg chg="add">
-        <pc:chgData name="Joshua Reiss" userId="71f87c30-4769-4a42-a082-a6a82298c8cb" providerId="ADAL" clId="{D788B803-6CAF-456E-9D5B-399D0D7F1309}" dt="2025-03-13T13:04:18.144" v="199"/>
-        <pc:sldMkLst>
-          <pc:docMk/>
-          <pc:sldMk cId="2879517915" sldId="273"/>
-        </pc:sldMkLst>
-      </pc:sldChg>
-      <pc:sldChg chg="add">
-        <pc:chgData name="Joshua Reiss" userId="71f87c30-4769-4a42-a082-a6a82298c8cb" providerId="ADAL" clId="{D788B803-6CAF-456E-9D5B-399D0D7F1309}" dt="2025-03-13T13:04:18.144" v="199"/>
-        <pc:sldMkLst>
-          <pc:docMk/>
-          <pc:sldMk cId="90723974" sldId="278"/>
-        </pc:sldMkLst>
-      </pc:sldChg>
-      <pc:sldChg chg="add">
-        <pc:chgData name="Joshua Reiss" userId="71f87c30-4769-4a42-a082-a6a82298c8cb" providerId="ADAL" clId="{D788B803-6CAF-456E-9D5B-399D0D7F1309}" dt="2025-03-13T13:04:18.144" v="199"/>
-        <pc:sldMkLst>
-          <pc:docMk/>
-          <pc:sldMk cId="1496450886" sldId="305"/>
-        </pc:sldMkLst>
-      </pc:sldChg>
-      <pc:sldChg chg="add">
-        <pc:chgData name="Joshua Reiss" userId="71f87c30-4769-4a42-a082-a6a82298c8cb" providerId="ADAL" clId="{D788B803-6CAF-456E-9D5B-399D0D7F1309}" dt="2025-03-13T13:04:18.144" v="199"/>
-        <pc:sldMkLst>
-          <pc:docMk/>
-          <pc:sldMk cId="1320625119" sldId="306"/>
-        </pc:sldMkLst>
-      </pc:sldChg>
-      <pc:sldChg chg="add">
-        <pc:chgData name="Joshua Reiss" userId="71f87c30-4769-4a42-a082-a6a82298c8cb" providerId="ADAL" clId="{D788B803-6CAF-456E-9D5B-399D0D7F1309}" dt="2025-03-13T13:04:18.144" v="199"/>
-        <pc:sldMkLst>
-          <pc:docMk/>
-          <pc:sldMk cId="2261269671" sldId="311"/>
-        </pc:sldMkLst>
-      </pc:sldChg>
-      <pc:sldChg chg="modSp mod">
-        <pc:chgData name="Joshua Reiss" userId="71f87c30-4769-4a42-a082-a6a82298c8cb" providerId="ADAL" clId="{D788B803-6CAF-456E-9D5B-399D0D7F1309}" dt="2025-03-13T20:53:53.421" v="209" actId="1036"/>
+      <pc:sldChg chg="addSp delSp modSp mod">
+        <pc:chgData name="Josh Reiss" userId="71f87c30-4769-4a42-a082-a6a82298c8cb" providerId="ADAL" clId="{A0C6B147-1166-4B44-A00D-F3D77F199F8E}" dt="2026-03-11T16:10:01.121" v="116" actId="14100"/>
         <pc:sldMkLst>
           <pc:docMk/>
           <pc:sldMk cId="1068395398" sldId="351"/>
         </pc:sldMkLst>
-      </pc:sldChg>
-      <pc:sldChg chg="addSp delSp modSp new mod">
-        <pc:chgData name="Joshua Reiss" userId="71f87c30-4769-4a42-a082-a6a82298c8cb" providerId="ADAL" clId="{D788B803-6CAF-456E-9D5B-399D0D7F1309}" dt="2025-03-12T13:16:47.584" v="198" actId="207"/>
-        <pc:sldMkLst>
-          <pc:docMk/>
-          <pc:sldMk cId="3176130722" sldId="362"/>
-        </pc:sldMkLst>
-      </pc:sldChg>
-      <pc:sldChg chg="add">
-        <pc:chgData name="Joshua Reiss" userId="71f87c30-4769-4a42-a082-a6a82298c8cb" providerId="ADAL" clId="{D788B803-6CAF-456E-9D5B-399D0D7F1309}" dt="2025-03-13T13:04:18.144" v="199"/>
-        <pc:sldMkLst>
-          <pc:docMk/>
-          <pc:sldMk cId="23973663" sldId="363"/>
-        </pc:sldMkLst>
-      </pc:sldChg>
-      <pc:sldChg chg="add del">
-        <pc:chgData name="Joshua Reiss" userId="71f87c30-4769-4a42-a082-a6a82298c8cb" providerId="ADAL" clId="{D788B803-6CAF-456E-9D5B-399D0D7F1309}" dt="2025-03-14T21:23:05.601" v="211"/>
-        <pc:sldMkLst>
-          <pc:docMk/>
-          <pc:sldMk cId="1769010252" sldId="364"/>
-        </pc:sldMkLst>
-      </pc:sldChg>
-      <pc:sldChg chg="addSp delSp modSp add mod">
-        <pc:chgData name="Joshua Reiss" userId="71f87c30-4769-4a42-a082-a6a82298c8cb" providerId="ADAL" clId="{D788B803-6CAF-456E-9D5B-399D0D7F1309}" dt="2025-03-14T21:37:44.031" v="505" actId="20577"/>
-        <pc:sldMkLst>
-          <pc:docMk/>
-          <pc:sldMk cId="2016982695" sldId="364"/>
-        </pc:sldMkLst>
-      </pc:sldChg>
-      <pc:sldChg chg="addSp delSp modSp add mod">
-        <pc:chgData name="Joshua Reiss" userId="71f87c30-4769-4a42-a082-a6a82298c8cb" providerId="ADAL" clId="{D788B803-6CAF-456E-9D5B-399D0D7F1309}" dt="2025-03-22T11:29:57.645" v="1202" actId="1076"/>
-        <pc:sldMkLst>
-          <pc:docMk/>
-          <pc:sldMk cId="201943988" sldId="365"/>
-        </pc:sldMkLst>
-      </pc:sldChg>
-      <pc:sldChg chg="addSp delSp modSp add mod">
-        <pc:chgData name="Joshua Reiss" userId="71f87c30-4769-4a42-a082-a6a82298c8cb" providerId="ADAL" clId="{D788B803-6CAF-456E-9D5B-399D0D7F1309}" dt="2025-03-23T09:26:15.203" v="1445" actId="1076"/>
-        <pc:sldMkLst>
-          <pc:docMk/>
-          <pc:sldMk cId="1978429239" sldId="366"/>
-        </pc:sldMkLst>
-      </pc:sldChg>
-      <pc:sldChg chg="addSp delSp modSp add mod">
-        <pc:chgData name="Joshua Reiss" userId="71f87c30-4769-4a42-a082-a6a82298c8cb" providerId="ADAL" clId="{D788B803-6CAF-456E-9D5B-399D0D7F1309}" dt="2025-04-02T15:03:00.425" v="2167" actId="692"/>
-        <pc:sldMkLst>
-          <pc:docMk/>
-          <pc:sldMk cId="361188305" sldId="367"/>
-        </pc:sldMkLst>
+        <pc:spChg chg="add mod">
+          <ac:chgData name="Josh Reiss" userId="71f87c30-4769-4a42-a082-a6a82298c8cb" providerId="ADAL" clId="{A0C6B147-1166-4B44-A00D-F3D77F199F8E}" dt="2026-03-11T16:07:40.427" v="82" actId="1038"/>
+          <ac:spMkLst>
+            <pc:docMk/>
+            <pc:sldMk cId="1068395398" sldId="351"/>
+            <ac:spMk id="3" creationId="{F8E2C474-1E52-8A35-9243-A4B8D54949C6}"/>
+          </ac:spMkLst>
+        </pc:spChg>
+        <pc:spChg chg="mod">
+          <ac:chgData name="Josh Reiss" userId="71f87c30-4769-4a42-a082-a6a82298c8cb" providerId="ADAL" clId="{A0C6B147-1166-4B44-A00D-F3D77F199F8E}" dt="2026-03-11T16:07:06.773" v="60" actId="14100"/>
+          <ac:spMkLst>
+            <pc:docMk/>
+            <pc:sldMk cId="1068395398" sldId="351"/>
+            <ac:spMk id="8" creationId="{61E249BF-AFF2-0D4A-65D5-7E7749D9131B}"/>
+          </ac:spMkLst>
+        </pc:spChg>
+        <pc:spChg chg="del">
+          <ac:chgData name="Josh Reiss" userId="71f87c30-4769-4a42-a082-a6a82298c8cb" providerId="ADAL" clId="{A0C6B147-1166-4B44-A00D-F3D77F199F8E}" dt="2026-03-11T16:05:53.453" v="19" actId="478"/>
+          <ac:spMkLst>
+            <pc:docMk/>
+            <pc:sldMk cId="1068395398" sldId="351"/>
+            <ac:spMk id="9" creationId="{35CF4F59-CBB9-A917-8E9C-1FA1FD4BCA78}"/>
+          </ac:spMkLst>
+        </pc:spChg>
+        <pc:spChg chg="mod">
+          <ac:chgData name="Josh Reiss" userId="71f87c30-4769-4a42-a082-a6a82298c8cb" providerId="ADAL" clId="{A0C6B147-1166-4B44-A00D-F3D77F199F8E}" dt="2026-03-11T16:10:01.121" v="116" actId="14100"/>
+          <ac:spMkLst>
+            <pc:docMk/>
+            <pc:sldMk cId="1068395398" sldId="351"/>
+            <ac:spMk id="10" creationId="{D6065EF3-BEF7-204F-513A-2B1A6279F3BA}"/>
+          </ac:spMkLst>
+        </pc:spChg>
+        <pc:spChg chg="mod">
+          <ac:chgData name="Josh Reiss" userId="71f87c30-4769-4a42-a082-a6a82298c8cb" providerId="ADAL" clId="{A0C6B147-1166-4B44-A00D-F3D77F199F8E}" dt="2026-03-11T16:05:24.430" v="15" actId="14100"/>
+          <ac:spMkLst>
+            <pc:docMk/>
+            <pc:sldMk cId="1068395398" sldId="351"/>
+            <ac:spMk id="11" creationId="{C6AAE93F-1C83-2CB5-0C2E-899629992753}"/>
+          </ac:spMkLst>
+        </pc:spChg>
+        <pc:spChg chg="mod">
+          <ac:chgData name="Josh Reiss" userId="71f87c30-4769-4a42-a082-a6a82298c8cb" providerId="ADAL" clId="{A0C6B147-1166-4B44-A00D-F3D77F199F8E}" dt="2026-03-11T16:08:10.147" v="97" actId="1037"/>
+          <ac:spMkLst>
+            <pc:docMk/>
+            <pc:sldMk cId="1068395398" sldId="351"/>
+            <ac:spMk id="16" creationId="{9E5054A7-E71D-74FC-A5D7-4CA6C933C5A1}"/>
+          </ac:spMkLst>
+        </pc:spChg>
+        <pc:cxnChg chg="add mod">
+          <ac:chgData name="Josh Reiss" userId="71f87c30-4769-4a42-a082-a6a82298c8cb" providerId="ADAL" clId="{A0C6B147-1166-4B44-A00D-F3D77F199F8E}" dt="2026-03-11T16:07:40.427" v="82" actId="1038"/>
+          <ac:cxnSpMkLst>
+            <pc:docMk/>
+            <pc:sldMk cId="1068395398" sldId="351"/>
+            <ac:cxnSpMk id="6" creationId="{0B07688A-61E4-2630-80CC-A655B054CB00}"/>
+          </ac:cxnSpMkLst>
+        </pc:cxnChg>
+        <pc:cxnChg chg="mod">
+          <ac:chgData name="Josh Reiss" userId="71f87c30-4769-4a42-a082-a6a82298c8cb" providerId="ADAL" clId="{A0C6B147-1166-4B44-A00D-F3D77F199F8E}" dt="2026-03-11T16:08:10.147" v="97" actId="1037"/>
+          <ac:cxnSpMkLst>
+            <pc:docMk/>
+            <pc:sldMk cId="1068395398" sldId="351"/>
+            <ac:cxnSpMk id="12" creationId="{63EA0B9F-E0EB-8818-D37F-1D5EC1ABE292}"/>
+          </ac:cxnSpMkLst>
+        </pc:cxnChg>
+        <pc:cxnChg chg="mod">
+          <ac:chgData name="Josh Reiss" userId="71f87c30-4769-4a42-a082-a6a82298c8cb" providerId="ADAL" clId="{A0C6B147-1166-4B44-A00D-F3D77F199F8E}" dt="2026-03-11T16:10:01.121" v="116" actId="14100"/>
+          <ac:cxnSpMkLst>
+            <pc:docMk/>
+            <pc:sldMk cId="1068395398" sldId="351"/>
+            <ac:cxnSpMk id="13" creationId="{851087B3-1DFB-F8AA-F6A8-382B27D913C8}"/>
+          </ac:cxnSpMkLst>
+        </pc:cxnChg>
+        <pc:cxnChg chg="mod">
+          <ac:chgData name="Josh Reiss" userId="71f87c30-4769-4a42-a082-a6a82298c8cb" providerId="ADAL" clId="{A0C6B147-1166-4B44-A00D-F3D77F199F8E}" dt="2026-03-11T16:09:08.291" v="108" actId="14100"/>
+          <ac:cxnSpMkLst>
+            <pc:docMk/>
+            <pc:sldMk cId="1068395398" sldId="351"/>
+            <ac:cxnSpMk id="14" creationId="{731EA1CD-F767-9863-5C36-B72AE30571B2}"/>
+          </ac:cxnSpMkLst>
+        </pc:cxnChg>
+        <pc:cxnChg chg="mod">
+          <ac:chgData name="Josh Reiss" userId="71f87c30-4769-4a42-a082-a6a82298c8cb" providerId="ADAL" clId="{A0C6B147-1166-4B44-A00D-F3D77F199F8E}" dt="2026-03-11T16:09:00.472" v="107" actId="14100"/>
+          <ac:cxnSpMkLst>
+            <pc:docMk/>
+            <pc:sldMk cId="1068395398" sldId="351"/>
+            <ac:cxnSpMk id="15" creationId="{27DDFB27-C24A-D139-68FE-CC4B4360B9AA}"/>
+          </ac:cxnSpMkLst>
+        </pc:cxnChg>
+        <pc:cxnChg chg="mod">
+          <ac:chgData name="Josh Reiss" userId="71f87c30-4769-4a42-a082-a6a82298c8cb" providerId="ADAL" clId="{A0C6B147-1166-4B44-A00D-F3D77F199F8E}" dt="2026-03-11T16:08:10.147" v="97" actId="1037"/>
+          <ac:cxnSpMkLst>
+            <pc:docMk/>
+            <pc:sldMk cId="1068395398" sldId="351"/>
+            <ac:cxnSpMk id="17" creationId="{4D57AE5B-136B-F08D-491B-E3545A1EF89F}"/>
+          </ac:cxnSpMkLst>
+        </pc:cxnChg>
+        <pc:cxnChg chg="add mod">
+          <ac:chgData name="Josh Reiss" userId="71f87c30-4769-4a42-a082-a6a82298c8cb" providerId="ADAL" clId="{A0C6B147-1166-4B44-A00D-F3D77F199F8E}" dt="2026-03-11T16:10:01.121" v="116" actId="14100"/>
+          <ac:cxnSpMkLst>
+            <pc:docMk/>
+            <pc:sldMk cId="1068395398" sldId="351"/>
+            <ac:cxnSpMk id="31" creationId="{6ACF50B7-ED74-C676-818E-03D341D9CC87}"/>
+          </ac:cxnSpMkLst>
+        </pc:cxnChg>
       </pc:sldChg>
     </pc:docChg>
   </pc:docChgLst>
@@ -413,7 +330,7 @@
           <a:p>
             <a:fld id="{D8E06A3B-885D-47A2-BBBF-3C17C577BFA5}" type="datetimeFigureOut">
               <a:rPr lang="en-GB" smtClean="0"/>
-              <a:t>26/08/2025</a:t>
+              <a:t>11/03/2026</a:t>
             </a:fld>
             <a:endParaRPr lang="en-GB"/>
           </a:p>
@@ -830,7 +747,7 @@
           <a:p>
             <a:fld id="{53F5E260-054C-4638-8D97-401FEF531A6C}" type="datetimeFigureOut">
               <a:rPr lang="en-GB" smtClean="0"/>
-              <a:t>26/08/2025</a:t>
+              <a:t>11/03/2026</a:t>
             </a:fld>
             <a:endParaRPr lang="en-GB"/>
           </a:p>
@@ -1030,7 +947,7 @@
           <a:p>
             <a:fld id="{53F5E260-054C-4638-8D97-401FEF531A6C}" type="datetimeFigureOut">
               <a:rPr lang="en-GB" smtClean="0"/>
-              <a:t>26/08/2025</a:t>
+              <a:t>11/03/2026</a:t>
             </a:fld>
             <a:endParaRPr lang="en-GB"/>
           </a:p>
@@ -1240,7 +1157,7 @@
           <a:p>
             <a:fld id="{53F5E260-054C-4638-8D97-401FEF531A6C}" type="datetimeFigureOut">
               <a:rPr lang="en-GB" smtClean="0"/>
-              <a:t>26/08/2025</a:t>
+              <a:t>11/03/2026</a:t>
             </a:fld>
             <a:endParaRPr lang="en-GB"/>
           </a:p>
@@ -1440,7 +1357,7 @@
           <a:p>
             <a:fld id="{53F5E260-054C-4638-8D97-401FEF531A6C}" type="datetimeFigureOut">
               <a:rPr lang="en-GB" smtClean="0"/>
-              <a:t>26/08/2025</a:t>
+              <a:t>11/03/2026</a:t>
             </a:fld>
             <a:endParaRPr lang="en-GB"/>
           </a:p>
@@ -1716,7 +1633,7 @@
           <a:p>
             <a:fld id="{53F5E260-054C-4638-8D97-401FEF531A6C}" type="datetimeFigureOut">
               <a:rPr lang="en-GB" smtClean="0"/>
-              <a:t>26/08/2025</a:t>
+              <a:t>11/03/2026</a:t>
             </a:fld>
             <a:endParaRPr lang="en-GB"/>
           </a:p>
@@ -1984,7 +1901,7 @@
           <a:p>
             <a:fld id="{53F5E260-054C-4638-8D97-401FEF531A6C}" type="datetimeFigureOut">
               <a:rPr lang="en-GB" smtClean="0"/>
-              <a:t>26/08/2025</a:t>
+              <a:t>11/03/2026</a:t>
             </a:fld>
             <a:endParaRPr lang="en-GB"/>
           </a:p>
@@ -2399,7 +2316,7 @@
           <a:p>
             <a:fld id="{53F5E260-054C-4638-8D97-401FEF531A6C}" type="datetimeFigureOut">
               <a:rPr lang="en-GB" smtClean="0"/>
-              <a:t>26/08/2025</a:t>
+              <a:t>11/03/2026</a:t>
             </a:fld>
             <a:endParaRPr lang="en-GB"/>
           </a:p>
@@ -2541,7 +2458,7 @@
           <a:p>
             <a:fld id="{53F5E260-054C-4638-8D97-401FEF531A6C}" type="datetimeFigureOut">
               <a:rPr lang="en-GB" smtClean="0"/>
-              <a:t>26/08/2025</a:t>
+              <a:t>11/03/2026</a:t>
             </a:fld>
             <a:endParaRPr lang="en-GB"/>
           </a:p>
@@ -2654,7 +2571,7 @@
           <a:p>
             <a:fld id="{53F5E260-054C-4638-8D97-401FEF531A6C}" type="datetimeFigureOut">
               <a:rPr lang="en-GB" smtClean="0"/>
-              <a:t>26/08/2025</a:t>
+              <a:t>11/03/2026</a:t>
             </a:fld>
             <a:endParaRPr lang="en-GB"/>
           </a:p>
@@ -2967,7 +2884,7 @@
           <a:p>
             <a:fld id="{53F5E260-054C-4638-8D97-401FEF531A6C}" type="datetimeFigureOut">
               <a:rPr lang="en-GB" smtClean="0"/>
-              <a:t>26/08/2025</a:t>
+              <a:t>11/03/2026</a:t>
             </a:fld>
             <a:endParaRPr lang="en-GB"/>
           </a:p>
@@ -3256,7 +3173,7 @@
           <a:p>
             <a:fld id="{53F5E260-054C-4638-8D97-401FEF531A6C}" type="datetimeFigureOut">
               <a:rPr lang="en-GB" smtClean="0"/>
-              <a:t>26/08/2025</a:t>
+              <a:t>11/03/2026</a:t>
             </a:fld>
             <a:endParaRPr lang="en-GB"/>
           </a:p>
@@ -3499,7 +3416,7 @@
           <a:p>
             <a:fld id="{53F5E260-054C-4638-8D97-401FEF531A6C}" type="datetimeFigureOut">
               <a:rPr lang="en-GB" smtClean="0"/>
-              <a:t>26/08/2025</a:t>
+              <a:t>11/03/2026</a:t>
             </a:fld>
             <a:endParaRPr lang="en-GB"/>
           </a:p>
@@ -3965,7 +3882,7 @@
         <p:spPr>
           <a:xfrm>
             <a:off x="2811460" y="2943040"/>
-            <a:ext cx="1122740" cy="648000"/>
+            <a:ext cx="818875" cy="648000"/>
           </a:xfrm>
           <a:prstGeom prst="rect">
             <a:avLst/>
@@ -4004,10 +3921,10 @@
       </p:sp>
       <p:sp>
         <p:nvSpPr>
-          <p:cNvPr id="9" name="Rectangle 8">
-            <a:extLst>
-              <a:ext uri="{FF2B5EF4-FFF2-40B4-BE49-F238E27FC236}">
-                <a16:creationId xmlns:a16="http://schemas.microsoft.com/office/drawing/2014/main" id="{35CF4F59-CBB9-A917-8E9C-1FA1FD4BCA78}"/>
+          <p:cNvPr id="10" name="Rectangle 9">
+            <a:extLst>
+              <a:ext uri="{FF2B5EF4-FFF2-40B4-BE49-F238E27FC236}">
+                <a16:creationId xmlns:a16="http://schemas.microsoft.com/office/drawing/2014/main" id="{D6065EF3-BEF7-204F-513A-2B1A6279F3BA}"/>
               </a:ext>
             </a:extLst>
           </p:cNvPr>
@@ -4016,8 +3933,8 @@
         </p:nvSpPr>
         <p:spPr>
           <a:xfrm>
-            <a:off x="6047980" y="1714119"/>
-            <a:ext cx="1080000" cy="648000"/>
+            <a:off x="4951190" y="1768437"/>
+            <a:ext cx="1069359" cy="648000"/>
           </a:xfrm>
           <a:prstGeom prst="rect">
             <a:avLst/>
@@ -4049,17 +3966,24 @@
             <a:pPr algn="ctr"/>
             <a:r>
               <a:rPr lang="en-GB" dirty="0"/>
-              <a:t>Delay</a:t>
-            </a:r>
-          </a:p>
-        </p:txBody>
-      </p:sp>
-      <p:sp>
-        <p:nvSpPr>
-          <p:cNvPr id="10" name="Rectangle 9">
-            <a:extLst>
-              <a:ext uri="{FF2B5EF4-FFF2-40B4-BE49-F238E27FC236}">
-                <a16:creationId xmlns:a16="http://schemas.microsoft.com/office/drawing/2014/main" id="{D6065EF3-BEF7-204F-513A-2B1A6279F3BA}"/>
+              <a:t>Feedback</a:t>
+            </a:r>
+          </a:p>
+          <a:p>
+            <a:pPr algn="ctr"/>
+            <a:r>
+              <a:rPr lang="en-GB" dirty="0"/>
+              <a:t>gain</a:t>
+            </a:r>
+          </a:p>
+        </p:txBody>
+      </p:sp>
+      <p:sp>
+        <p:nvSpPr>
+          <p:cNvPr id="11" name="Rectangle 10">
+            <a:extLst>
+              <a:ext uri="{FF2B5EF4-FFF2-40B4-BE49-F238E27FC236}">
+                <a16:creationId xmlns:a16="http://schemas.microsoft.com/office/drawing/2014/main" id="{C6AAE93F-1C83-2CB5-0C2E-899629992753}"/>
               </a:ext>
             </a:extLst>
           </p:cNvPr>
@@ -4068,8 +3992,8 @@
         </p:nvSpPr>
         <p:spPr>
           <a:xfrm>
-            <a:off x="4417208" y="1714119"/>
-            <a:ext cx="1080000" cy="648000"/>
+            <a:off x="7667979" y="2943040"/>
+            <a:ext cx="972655" cy="648000"/>
           </a:xfrm>
           <a:prstGeom prst="rect">
             <a:avLst/>
@@ -4100,59 +4024,6 @@
           <a:p>
             <a:pPr algn="ctr"/>
             <a:r>
-              <a:rPr lang="en-GB" dirty="0" err="1"/>
-              <a:t>Feedbackgain</a:t>
-            </a:r>
-            <a:endParaRPr lang="en-GB" dirty="0"/>
-          </a:p>
-        </p:txBody>
-      </p:sp>
-      <p:sp>
-        <p:nvSpPr>
-          <p:cNvPr id="11" name="Rectangle 10">
-            <a:extLst>
-              <a:ext uri="{FF2B5EF4-FFF2-40B4-BE49-F238E27FC236}">
-                <a16:creationId xmlns:a16="http://schemas.microsoft.com/office/drawing/2014/main" id="{C6AAE93F-1C83-2CB5-0C2E-899629992753}"/>
-              </a:ext>
-            </a:extLst>
-          </p:cNvPr>
-          <p:cNvSpPr/>
-          <p:nvPr/>
-        </p:nvSpPr>
-        <p:spPr>
-          <a:xfrm>
-            <a:off x="7344635" y="2943040"/>
-            <a:ext cx="1296000" cy="648000"/>
-          </a:xfrm>
-          <a:prstGeom prst="rect">
-            <a:avLst/>
-          </a:prstGeom>
-          <a:solidFill>
-            <a:srgbClr val="7030A0"/>
-          </a:solidFill>
-        </p:spPr>
-        <p:style>
-          <a:lnRef idx="2">
-            <a:schemeClr val="accent1">
-              <a:shade val="50000"/>
-            </a:schemeClr>
-          </a:lnRef>
-          <a:fillRef idx="1">
-            <a:schemeClr val="accent1"/>
-          </a:fillRef>
-          <a:effectRef idx="0">
-            <a:schemeClr val="accent1"/>
-          </a:effectRef>
-          <a:fontRef idx="minor">
-            <a:schemeClr val="lt1"/>
-          </a:fontRef>
-        </p:style>
-        <p:txBody>
-          <a:bodyPr rtlCol="0" anchor="ctr"/>
-          <a:lstStyle/>
-          <a:p>
-            <a:pPr algn="ctr"/>
-            <a:r>
               <a:rPr lang="en-GB" dirty="0"/>
               <a:t>Output</a:t>
             </a:r>
@@ -4177,8 +4048,8 @@
         </p:nvCxnSpPr>
         <p:spPr>
           <a:xfrm>
-            <a:off x="3934200" y="3267040"/>
-            <a:ext cx="744156" cy="0"/>
+            <a:off x="3630335" y="3267040"/>
+            <a:ext cx="564953" cy="0"/>
           </a:xfrm>
           <a:prstGeom prst="straightConnector1">
             <a:avLst/>
@@ -4216,15 +4087,14 @@
           </p:cNvPr>
           <p:cNvCxnSpPr>
             <a:cxnSpLocks/>
-            <a:stCxn id="9" idx="1"/>
             <a:endCxn id="10" idx="3"/>
           </p:cNvCxnSpPr>
           <p:nvPr/>
         </p:nvCxnSpPr>
         <p:spPr>
           <a:xfrm flipH="1">
-            <a:off x="5497208" y="2038119"/>
-            <a:ext cx="550772" cy="0"/>
+            <a:off x="6020549" y="2092437"/>
+            <a:ext cx="549325" cy="0"/>
           </a:xfrm>
           <a:prstGeom prst="straightConnector1">
             <a:avLst/>
@@ -4262,14 +4132,59 @@
           </p:cNvPr>
           <p:cNvCxnSpPr>
             <a:cxnSpLocks/>
-            <a:endCxn id="9" idx="2"/>
+            <a:stCxn id="3" idx="0"/>
           </p:cNvCxnSpPr>
           <p:nvPr/>
         </p:nvCxnSpPr>
         <p:spPr>
           <a:xfrm flipV="1">
-            <a:off x="6587980" y="2362119"/>
-            <a:ext cx="0" cy="904921"/>
+            <a:off x="6580454" y="2092199"/>
+            <a:ext cx="0" cy="850761"/>
+          </a:xfrm>
+          <a:prstGeom prst="straightConnector1">
+            <a:avLst/>
+          </a:prstGeom>
+          <a:ln w="31750">
+            <a:solidFill>
+              <a:schemeClr val="tx1"/>
+            </a:solidFill>
+            <a:tailEnd type="none" w="lg" len="lg"/>
+          </a:ln>
+        </p:spPr>
+        <p:style>
+          <a:lnRef idx="1">
+            <a:schemeClr val="accent1"/>
+          </a:lnRef>
+          <a:fillRef idx="0">
+            <a:schemeClr val="accent1"/>
+          </a:fillRef>
+          <a:effectRef idx="0">
+            <a:schemeClr val="accent1"/>
+          </a:effectRef>
+          <a:fontRef idx="minor">
+            <a:schemeClr val="tx1"/>
+          </a:fontRef>
+        </p:style>
+      </p:cxnSp>
+      <p:cxnSp>
+        <p:nvCxnSpPr>
+          <p:cNvPr id="15" name="Straight Arrow Connector 14">
+            <a:extLst>
+              <a:ext uri="{FF2B5EF4-FFF2-40B4-BE49-F238E27FC236}">
+                <a16:creationId xmlns:a16="http://schemas.microsoft.com/office/drawing/2014/main" id="{27DDFB27-C24A-D139-68FE-CC4B4360B9AA}"/>
+              </a:ext>
+            </a:extLst>
+          </p:cNvPr>
+          <p:cNvCxnSpPr>
+            <a:cxnSpLocks/>
+            <a:endCxn id="16" idx="0"/>
+          </p:cNvCxnSpPr>
+          <p:nvPr/>
+        </p:nvCxnSpPr>
+        <p:spPr>
+          <a:xfrm>
+            <a:off x="4465288" y="2092199"/>
+            <a:ext cx="0" cy="904841"/>
           </a:xfrm>
           <a:prstGeom prst="straightConnector1">
             <a:avLst/>
@@ -4296,52 +4211,6 @@
           </a:fontRef>
         </p:style>
       </p:cxnSp>
-      <p:cxnSp>
-        <p:nvCxnSpPr>
-          <p:cNvPr id="15" name="Straight Arrow Connector 14">
-            <a:extLst>
-              <a:ext uri="{FF2B5EF4-FFF2-40B4-BE49-F238E27FC236}">
-                <a16:creationId xmlns:a16="http://schemas.microsoft.com/office/drawing/2014/main" id="{27DDFB27-C24A-D139-68FE-CC4B4360B9AA}"/>
-              </a:ext>
-            </a:extLst>
-          </p:cNvPr>
-          <p:cNvCxnSpPr>
-            <a:cxnSpLocks/>
-            <a:stCxn id="10" idx="2"/>
-            <a:endCxn id="16" idx="0"/>
-          </p:cNvCxnSpPr>
-          <p:nvPr/>
-        </p:nvCxnSpPr>
-        <p:spPr>
-          <a:xfrm flipH="1">
-            <a:off x="4948356" y="2362119"/>
-            <a:ext cx="8852" cy="634921"/>
-          </a:xfrm>
-          <a:prstGeom prst="straightConnector1">
-            <a:avLst/>
-          </a:prstGeom>
-          <a:ln w="31750">
-            <a:solidFill>
-              <a:schemeClr val="tx1"/>
-            </a:solidFill>
-            <a:tailEnd type="arrow" w="lg" len="lg"/>
-          </a:ln>
-        </p:spPr>
-        <p:style>
-          <a:lnRef idx="1">
-            <a:schemeClr val="accent1"/>
-          </a:lnRef>
-          <a:fillRef idx="0">
-            <a:schemeClr val="accent1"/>
-          </a:fillRef>
-          <a:effectRef idx="0">
-            <a:schemeClr val="accent1"/>
-          </a:effectRef>
-          <a:fontRef idx="minor">
-            <a:schemeClr val="tx1"/>
-          </a:fontRef>
-        </p:style>
-      </p:cxnSp>
       <p:sp>
         <p:nvSpPr>
           <p:cNvPr id="16" name="Oval 15">
@@ -4356,7 +4225,7 @@
         </p:nvSpPr>
         <p:spPr>
           <a:xfrm>
-            <a:off x="4678356" y="2997040"/>
+            <a:off x="4195288" y="2997040"/>
             <a:ext cx="540000" cy="540000"/>
           </a:xfrm>
           <a:prstGeom prst="ellipse">
@@ -4411,14 +4280,14 @@
           <p:cNvCxnSpPr>
             <a:cxnSpLocks/>
             <a:stCxn id="16" idx="6"/>
-            <a:endCxn id="11" idx="1"/>
+            <a:endCxn id="3" idx="1"/>
           </p:cNvCxnSpPr>
           <p:nvPr/>
         </p:nvCxnSpPr>
         <p:spPr>
-          <a:xfrm>
-            <a:off x="5218356" y="3267040"/>
-            <a:ext cx="2126279" cy="0"/>
+          <a:xfrm flipV="1">
+            <a:off x="4735288" y="3266960"/>
+            <a:ext cx="1395216" cy="80"/>
           </a:xfrm>
           <a:prstGeom prst="straightConnector1">
             <a:avLst/>
@@ -4765,6 +4634,149 @@
           </a:graphicData>
         </a:graphic>
       </p:graphicFrame>
+      <p:sp>
+        <p:nvSpPr>
+          <p:cNvPr id="3" name="Rectangle 2">
+            <a:extLst>
+              <a:ext uri="{FF2B5EF4-FFF2-40B4-BE49-F238E27FC236}">
+                <a16:creationId xmlns:a16="http://schemas.microsoft.com/office/drawing/2014/main" id="{F8E2C474-1E52-8A35-9243-A4B8D54949C6}"/>
+              </a:ext>
+            </a:extLst>
+          </p:cNvPr>
+          <p:cNvSpPr/>
+          <p:nvPr/>
+        </p:nvSpPr>
+        <p:spPr>
+          <a:xfrm>
+            <a:off x="6130504" y="2942960"/>
+            <a:ext cx="899900" cy="648000"/>
+          </a:xfrm>
+          <a:prstGeom prst="rect">
+            <a:avLst/>
+          </a:prstGeom>
+          <a:solidFill>
+            <a:srgbClr val="7030A0"/>
+          </a:solidFill>
+        </p:spPr>
+        <p:style>
+          <a:lnRef idx="2">
+            <a:schemeClr val="accent1">
+              <a:shade val="50000"/>
+            </a:schemeClr>
+          </a:lnRef>
+          <a:fillRef idx="1">
+            <a:schemeClr val="accent1"/>
+          </a:fillRef>
+          <a:effectRef idx="0">
+            <a:schemeClr val="accent1"/>
+          </a:effectRef>
+          <a:fontRef idx="minor">
+            <a:schemeClr val="lt1"/>
+          </a:fontRef>
+        </p:style>
+        <p:txBody>
+          <a:bodyPr rtlCol="0" anchor="ctr"/>
+          <a:lstStyle/>
+          <a:p>
+            <a:pPr algn="ctr"/>
+            <a:r>
+              <a:rPr lang="en-GB" dirty="0"/>
+              <a:t>Delay</a:t>
+            </a:r>
+          </a:p>
+        </p:txBody>
+      </p:sp>
+      <p:cxnSp>
+        <p:nvCxnSpPr>
+          <p:cNvPr id="6" name="Straight Arrow Connector 5">
+            <a:extLst>
+              <a:ext uri="{FF2B5EF4-FFF2-40B4-BE49-F238E27FC236}">
+                <a16:creationId xmlns:a16="http://schemas.microsoft.com/office/drawing/2014/main" id="{0B07688A-61E4-2630-80CC-A655B054CB00}"/>
+              </a:ext>
+            </a:extLst>
+          </p:cNvPr>
+          <p:cNvCxnSpPr>
+            <a:cxnSpLocks/>
+            <a:stCxn id="3" idx="3"/>
+            <a:endCxn id="11" idx="1"/>
+          </p:cNvCxnSpPr>
+          <p:nvPr/>
+        </p:nvCxnSpPr>
+        <p:spPr>
+          <a:xfrm>
+            <a:off x="7030404" y="3266960"/>
+            <a:ext cx="637575" cy="80"/>
+          </a:xfrm>
+          <a:prstGeom prst="straightConnector1">
+            <a:avLst/>
+          </a:prstGeom>
+          <a:ln w="31750">
+            <a:solidFill>
+              <a:schemeClr val="tx1"/>
+            </a:solidFill>
+            <a:tailEnd type="arrow" w="lg" len="lg"/>
+          </a:ln>
+        </p:spPr>
+        <p:style>
+          <a:lnRef idx="1">
+            <a:schemeClr val="accent1"/>
+          </a:lnRef>
+          <a:fillRef idx="0">
+            <a:schemeClr val="accent1"/>
+          </a:fillRef>
+          <a:effectRef idx="0">
+            <a:schemeClr val="accent1"/>
+          </a:effectRef>
+          <a:fontRef idx="minor">
+            <a:schemeClr val="tx1"/>
+          </a:fontRef>
+        </p:style>
+      </p:cxnSp>
+      <p:cxnSp>
+        <p:nvCxnSpPr>
+          <p:cNvPr id="31" name="Straight Arrow Connector 30">
+            <a:extLst>
+              <a:ext uri="{FF2B5EF4-FFF2-40B4-BE49-F238E27FC236}">
+                <a16:creationId xmlns:a16="http://schemas.microsoft.com/office/drawing/2014/main" id="{6ACF50B7-ED74-C676-818E-03D341D9CC87}"/>
+              </a:ext>
+            </a:extLst>
+          </p:cNvPr>
+          <p:cNvCxnSpPr>
+            <a:cxnSpLocks/>
+            <a:stCxn id="10" idx="1"/>
+          </p:cNvCxnSpPr>
+          <p:nvPr/>
+        </p:nvCxnSpPr>
+        <p:spPr>
+          <a:xfrm flipH="1" flipV="1">
+            <a:off x="4465288" y="2092199"/>
+            <a:ext cx="485902" cy="238"/>
+          </a:xfrm>
+          <a:prstGeom prst="straightConnector1">
+            <a:avLst/>
+          </a:prstGeom>
+          <a:ln w="31750">
+            <a:solidFill>
+              <a:schemeClr val="tx1"/>
+            </a:solidFill>
+            <a:tailEnd type="none" w="lg" len="lg"/>
+          </a:ln>
+        </p:spPr>
+        <p:style>
+          <a:lnRef idx="1">
+            <a:schemeClr val="accent1"/>
+          </a:lnRef>
+          <a:fillRef idx="0">
+            <a:schemeClr val="accent1"/>
+          </a:fillRef>
+          <a:effectRef idx="0">
+            <a:schemeClr val="accent1"/>
+          </a:effectRef>
+          <a:fontRef idx="minor">
+            <a:schemeClr val="tx1"/>
+          </a:fontRef>
+        </p:style>
+      </p:cxnSp>
     </p:spTree>
     <p:extLst>
       <p:ext uri="{BB962C8B-B14F-4D97-AF65-F5344CB8AC3E}">
